--- a/first/deck/对跖点路演/对跖点路演.pptx
+++ b/first/deck/对跖点路演/对跖点路演.pptx
@@ -552,7 +552,7 @@
   <p:cSld>
     <p:spTree>
       <p:nvGrpSpPr>
-        <p:cNvPr id="1" name="" descr="&lt;Slide style={{ width: 1280, height: 720, background: 'linear-gradient(120deg, #14161A 0%, #1D2430 100%)', padding: '0px' }}&gt;&#10;    &lt;Box style={{ position: 'relative', width: 1280, height: 720, flexDirection: 'row', padding: '0px 80px', alignItems: 'center' }}&gt;&#10;&#10;        {/* 右侧：对跖点圆环 —— 两个永远看不到彼此的点 */}&#10;        &lt;Box style={{ position: 'absolute', right: 96, top: 150, width: 400, height: 400 }}&gt;&#10;            &lt;Box style={{ position: 'absolute', left: 0, top: 0, width: 400, height: 400, borderRadius: 200, border: '1px solid rgba(247,245,240,0.20)' }} /&gt;&#10;            &lt;Box style={{ position: 'absolute', left: 199, top: 0, width: 2, height: 400, background: 'rgba(194,65,12,0.55)' }} /&gt;&#10;            &lt;Box style={{ position: 'absolute', left: 322, top: 78, width: 26, height: 26, borderRadius: 13, background: '#F7F5F0' }} /&gt;&#10;            &lt;Box style={{ position: 'absolute', left: 52, top: 296, width: 26, height: 26, borderRadius: 13, background: '#C2410C' }} /&gt;&#10;            &lt;Text style={{ position: 'absolute', left: 356, top: 84, fontSize: 13, color: 'rgba(247,245,240,0.55)' }}&gt;你在这&lt;/Text&gt;&#10;            &lt;Text style={{ position: 'absolute', left: 86, top: 300, fontSize: 13, color: '#C2410C' }}&gt;它在这&lt;/Text&gt;&#10;        &lt;/Box&gt;&#10;&#10;        {/* 左侧：标题区 */}&#10;        &lt;Box style={{ width: 660, flexDirection: 'column' }}&gt;&#10;            &lt;Text style={{ fontSize: 13, letterSpacing: 2, color: 'rgba(247,245,240,0.50)', marginBottom: 26 }}&gt;&#10;                TECHATHON 2026 · 融合信息软件 · 上海科技大学&#10;            &lt;/Text&gt;&#10;            &lt;Text style={{ fontSize: 96, fontWeight: 'bold', color: '#F7F5F0', lineHeight: 1.05, letterSpacing: 4 }}&gt;&#10;                对跖点&#10;            &lt;/Text&gt;&#10;            &lt;Text style={{ fontSize: 15, letterSpacing: 9, color: '#C2410C', marginTop: 10 }}&gt;&#10;                A N T I P O D E&#10;            &lt;/Text&gt;&#10;            &lt;Box style={{ width: 64, height: 2, background: '#C2410C', marginTop: 34, marginBottom: 30 }} /&gt;&#10;            &lt;Text style={{ fontSize: 30, color: 'rgba(247,245,240,0.92)', lineHeight: 1.5 }}&gt;&#10;                左边是你收的，&lt;br /&gt;右边是你没看见的。&#10;            &lt;/Text&gt;&#10;            &lt;Text style={{ fontSize: 18, color: 'rgba(247,245,240,0.55)', marginTop: 22, lineHeight: 1.6 }}&gt;&#10;                一个自动为你的信息库建立「反仓库」的系统&#10;            &lt;/Text&gt;&#10;        &lt;/Box&gt;&#10;    &lt;/Box&gt;&#10;&lt;/Slide&gt;&#10;"/>
+        <p:cNvPr id="1" name=""/>
         <p:cNvGrpSpPr/>
         <p:nvPr/>
       </p:nvGrpSpPr>
@@ -593,7 +593,10 @@
         </p:spPr>
         <p:txBody>
           <a:bodyPr/>
-          <a:p/>
+          <a:p>
+            <a:pPr/>
+            <a:endParaRPr/>
+          </a:p>
         </p:txBody>
       </p:sp>
       <p:sp>
@@ -760,7 +763,10 @@
         </p:spPr>
         <p:txBody>
           <a:bodyPr/>
-          <a:p/>
+          <a:p>
+            <a:pPr/>
+            <a:endParaRPr/>
+          </a:p>
         </p:txBody>
       </p:sp>
       <p:sp>
@@ -884,7 +890,10 @@
         </p:spPr>
         <p:txBody>
           <a:bodyPr/>
-          <a:p/>
+          <a:p>
+            <a:pPr/>
+            <a:endParaRPr/>
+          </a:p>
         </p:txBody>
       </p:sp>
       <p:sp>
@@ -910,7 +919,10 @@
         </p:spPr>
         <p:txBody>
           <a:bodyPr/>
-          <a:p/>
+          <a:p>
+            <a:pPr/>
+            <a:endParaRPr/>
+          </a:p>
         </p:txBody>
       </p:sp>
       <p:sp>
@@ -936,7 +948,10 @@
         </p:spPr>
         <p:txBody>
           <a:bodyPr/>
-          <a:p/>
+          <a:p>
+            <a:pPr/>
+            <a:endParaRPr/>
+          </a:p>
         </p:txBody>
       </p:sp>
       <p:sp>
@@ -962,7 +977,10 @@
         </p:spPr>
         <p:txBody>
           <a:bodyPr/>
-          <a:p/>
+          <a:p>
+            <a:pPr/>
+            <a:endParaRPr/>
+          </a:p>
         </p:txBody>
       </p:sp>
       <p:sp>
@@ -1047,7 +1065,7 @@
   <p:cSld>
     <p:spTree>
       <p:nvGrpSpPr>
-        <p:cNvPr id="15" name="" descr="&lt;Slide style={{ width: 1280, height: 720, background: '#F7F5F0', padding: '0px' }}&gt;&#10;    &lt;Box style={{ position: 'relative', width: 1280, height: 720, padding: '20px 60px' }}&gt;&#10;&#10;        {/* A 标题块 */}&#10;        &lt;Box style={{ height: 100, flexDirection: 'column', justifyContent: 'center' }}&gt;&#10;            &lt;Text style={{ fontSize: 13, letterSpacing: 3, color: '#2F5BE4', marginBottom: 8 }}&gt;0 1 · 问 题&lt;/Text&gt;&#10;            &lt;Text style={{ fontSize: 36, fontWeight: 'bold', color: '#14161A', lineHeight: 1.25 }}&gt;推荐越准，你越窄&lt;/Text&gt;&#10;        &lt;/Box&gt;&#10;&#10;        {/* B 内容区：巨型引言 + 三行事实 */}&#10;        &lt;Box style={{ height: 540 }}&gt;&#10;            &lt;Text style={{ fontSize: 40, fontWeight: 'bold', color: '#14161A', lineHeight: 1.45 }}&gt;&#10;                所有产品都在回答&lt;br /&gt;&#10;                &lt;span style={{ color: '#2F5BE4' }}&gt;「你还想要什么」&lt;/span&gt;&#10;            &lt;/Text&gt;&#10;            &lt;Text style={{ fontSize: 40, fontWeight: 'bold', color: 'rgba(20,22,26,0.38)', lineHeight: 1.45, marginTop: 6 }}&gt;&#10;                没有人回答「你漏了什么」&#10;            &lt;/Text&gt;&#10;&#10;            &lt;Box style={{ marginTop: 44, borderTop: '1px solid rgba(20,22,26,0.10)' }} /&gt;&#10;&#10;            &lt;Box style={{ flexDirection: 'row', alignItems: 'flex-start', paddingTop: 22, paddingBottom: 22, borderBottom: '1px solid rgba(20,22,26,0.10)' }}&gt;&#10;                &lt;Text style={{ width: 64, fontSize: 20, fontWeight: 'bold', color: '#C2410C' }}&gt;01&lt;/Text&gt;&#10;                &lt;Text style={{ flex: 1, fontSize: 21, color: '#14161A', lineHeight: 1.55 }}&gt;&#10;                    平台的优化目标是&lt;span style={{ fontWeight: 'bold' }}&gt;停留时长&lt;/span&gt;，不是你的判断质量。&#10;                &lt;/Text&gt;&#10;            &lt;/Box&gt;&#10;&#10;            &lt;Box style={{ flexDirection: 'row', alignItems: 'flex-start', paddingTop: 22, paddingBottom: 22, borderBottom: '1px solid rgba(20,22,26,0.10)' }}&gt;&#10;                &lt;Text style={{ width: 64, fontSize: 20, fontWeight: 'bold', color: '#C2410C' }}&gt;02&lt;/Text&gt;&#10;                &lt;Text style={{ flex: 1, fontSize: 21, color: '#14161A', lineHeight: 1.55 }}&gt;&#10;                    你关注微服务，它就只给你微服务；你相信 TDD，它就只给你 TDD 的成功案例。&#10;                &lt;/Text&gt;&#10;            &lt;/Box&gt;&#10;&#10;            &lt;Box style={{ flexDirection: 'row', alignItems: 'flex-start', paddingTop: 22 }}&gt;&#10;                &lt;Text style={{ width: 64, fontSize: 20, fontWeight: 'bold', color: '#C2410C' }}&gt;03&lt;/Text&gt;&#10;                &lt;Text style={{ flex: 1, fontSize: 21, color: '#14161A', lineHeight: 1.55 }}&gt;&#10;                    真正的盲区不会自己出现 —— 因为它不在你的兴趣画像里。&#10;                &lt;/Text&gt;&#10;            &lt;/Box&gt;&#10;        &lt;/Box&gt;&#10;&#10;        {/* C 页脚 */}&#10;        &lt;Box style={{ position: 'absolute', left: 60, right: 60, bottom: 20, flexDirection: 'row', justifyContent: 'space-between' }}&gt;&#10;            &lt;Text style={{ fontSize: 13, color: 'rgba(20,22,26,0.40)' }}&gt;ANTIPODE · TECHATHON 2026&lt;/Text&gt;&#10;            &lt;Text style={{ fontSize: 13, color: 'rgba(20,22,26,0.40)' }}&gt;02 / 09&lt;/Text&gt;&#10;        &lt;/Box&gt;&#10;    &lt;/Box&gt;&#10;&lt;/Slide&gt;&#10;"/>
+        <p:cNvPr id="15" name=""/>
         <p:cNvGrpSpPr/>
         <p:nvPr/>
       </p:nvGrpSpPr>
@@ -1080,7 +1098,10 @@
         </p:spPr>
         <p:txBody>
           <a:bodyPr/>
-          <a:p/>
+          <a:p>
+            <a:pPr/>
+            <a:endParaRPr/>
+          </a:p>
         </p:txBody>
       </p:sp>
       <p:sp>
@@ -1312,7 +1333,10 @@
         </p:spPr>
         <p:txBody>
           <a:bodyPr/>
-          <a:p/>
+          <a:p>
+            <a:pPr/>
+            <a:endParaRPr/>
+          </a:p>
         </p:txBody>
       </p:sp>
       <p:sp>
@@ -1354,7 +1378,10 @@
         </p:spPr>
         <p:txBody>
           <a:bodyPr/>
-          <a:p/>
+          <a:p>
+            <a:pPr/>
+            <a:endParaRPr/>
+          </a:p>
         </p:txBody>
       </p:sp>
       <p:sp>
@@ -1486,7 +1513,10 @@
         </p:spPr>
         <p:txBody>
           <a:bodyPr/>
-          <a:p/>
+          <a:p>
+            <a:pPr/>
+            <a:endParaRPr/>
+          </a:p>
         </p:txBody>
       </p:sp>
       <p:sp>
@@ -1773,7 +1803,7 @@
   <p:cSld>
     <p:spTree>
       <p:nvGrpSpPr>
-        <p:cNvPr id="32" name="" descr="&lt;Slide style={{ width: 1280, height: 720, background: '#F7F5F0', padding: '0px' }}&gt;&#13;&#10;    &lt;Box style={{ position: 'relative', width: 1280, height: 720, padding: '20px 60px' }}&gt;&#13;&#10;&#13;&#10;        &lt;Box style={{ height: 100, flexDirection: 'column', justifyContent: 'center' }}&gt;&#13;&#10;            &lt;Text style={{ fontSize: 13, letterSpacing: 3, color: '#2F5BE4', marginBottom: 8 }}&gt;0 2 · 设 计 判 断&lt;/Text&gt;&#13;&#10;            &lt;Text style={{ fontSize: 36, fontWeight: 'bold', color: '#14161A', lineHeight: 1.25 }}&gt;&#13;&#10;                「相反」不是一种东西，是三种&#13;&#10;            &lt;/Text&gt;&#13;&#10;        &lt;/Box&gt;&#13;&#10;&#13;&#10;        &lt;Box style={{ height: 540 }}&gt;&#13;&#10;            &lt;Text style={{ fontSize: 19, color: 'rgba(20,22,26,0.55)', marginBottom: 26 }}&gt;&#13;&#10;                不先把它们分开，反仓库必然退化成「杠精池」。&#13;&#10;            &lt;/Text&gt;&#13;&#10;&#13;&#10;            &lt;Box style={{ flexDirection: 'row', gap: 20, height: 404, alignItems: 'stretch' }}&gt;&#13;&#10;&#13;&#10;                {/* A 类 */}&#13;&#10;                &lt;Box style={{ flex: 1, height: 404, background: '#FFFFFF', borderTop: '3px solid #2F5BE4', padding: '24px 26px', flexDirection: 'column' }}&gt;&#13;&#10;                    &lt;Text style={{ fontSize: 56, fontWeight: 'bold', color: '#2F5BE4', lineHeight: 1.0 }}&gt;A&lt;/Text&gt;&#13;&#10;                    &lt;Text style={{ fontSize: 26, fontWeight: 'bold', color: '#14161A', marginTop: 14 }}&gt;观点对立&lt;/Text&gt;&#13;&#10;                    &lt;Text style={{ fontSize: 18, color: 'rgba(20,22,26,0.55)', marginTop: 6, lineHeight: 1.5 }}&gt;同议题、反立场&lt;/Text&gt;&#13;&#10;                    &lt;Text style={{ fontSize: 19, color: '#14161A', marginTop: 20, lineHeight: 1.6 }}&gt;&#13;&#10;                        你信微服务&lt;br /&gt;→ 找到「我们把微服务拆回单体」&#13;&#10;                    &lt;/Text&gt;&#13;&#10;                    &lt;Box style={{ marginTop: 'auto', paddingTop: 16, borderTop: '1px solid rgba(20,22,26,0.10)' }}&gt;&#13;&#10;                        &lt;Text style={{ fontSize: 15, fontWeight: 'bold', color: '#2F5BE4' }}&gt;本期已实现并跑通&lt;/Text&gt;&#13;&#10;                    &lt;/Box&gt;&#13;&#10;                &lt;/Box&gt;&#13;&#10;&#13;&#10;                {/* B 类 */}&#13;&#10;                &lt;Box style={{ flex: 1, height: 404, background: 'rgba(20,22,26,0.035)', borderTop: '3px solid rgba(20,22,26,0.18)', padding: '24px 26px', flexDirection: 'column' }}&gt;&#13;&#10;                    &lt;Text style={{ fontSize: 56, fontWeight: 'bold', color: 'rgba(20,22,26,0.30)', lineHeight: 1.0 }}&gt;B&lt;/Text&gt;&#13;&#10;                    &lt;Text style={{ fontSize: 26, fontWeight: 'bold', color: 'rgba(20,22,26,0.72)', marginTop: 14 }}&gt;反向证据&lt;/Text&gt;&#13;&#10;                    &lt;Text style={{ fontSize: 18, color: 'rgba(20,22,26,0.45)', marginTop: 6, lineHeight: 1.5 }}&gt;反驳你结论的具体事实&lt;/Text&gt;&#13;&#10;                    &lt;Text style={{ fontSize: 19, color: 'rgba(20,22,26,0.62)', marginTop: 20, lineHeight: 1.6 }}&gt;&#13;&#10;                        你信「微服务＝高可用」&lt;br /&gt;→ 找到「因微服务故障 12 小时」&#13;&#10;                    &lt;/Text&gt;&#13;&#10;                    &lt;Box style={{ marginTop: 'auto', paddingTop: 16, borderTop: '1px solid rgba(20,22,26,0.10)' }}&gt;&#13;&#10;                        &lt;Text style={{ fontSize: 15, color: 'rgba(20,22,26,0.40)' }}&gt;数据模型已留位&lt;/Text&gt;&#13;&#10;                    &lt;/Box&gt;&#13;&#10;                &lt;/Box&gt;&#13;&#10;&#13;&#10;                {/* C 类 */}&#13;&#10;                &lt;Box style={{ flex: 1, height: 404, background: 'rgba(20,22,26,0.035)', borderTop: '3px solid rgba(20,22,26,0.18)', padding: '24px 26px', flexDirection: 'column' }}&gt;&#13;&#10;                    &lt;Text style={{ fontSize: 56, fontWeight: 'bold', color: 'rgba(20,22,26,0.30)', lineHeight: 1.0 }}&gt;C&lt;/Text&gt;&#13;&#10;                    &lt;Text style={{ fontSize: 26, fontWeight: 'bold', color: 'rgba(20,22,26,0.72)', marginTop: 14 }}&gt;视野缺失&lt;/Text&gt;&#13;&#10;                    &lt;Text style={{ fontSize: 18, color: 'rgba(20,22,26,0.45)', marginTop: 6, lineHeight: 1.5 }}&gt;你完全没覆盖的相邻议题&lt;/Text&gt;&#13;&#10;                    &lt;Text style={{ fontSize: 19, color: 'rgba(20,22,26,0.62)', marginTop: 20, lineHeight: 1.6 }}&gt;&#13;&#10;                        你只看微服务&lt;br /&gt;→ 提示 Serverless 这条路&#13;&#10;                    &lt;/Text&gt;&#13;&#10;                    &lt;Box style={{ marginTop: 'auto', paddingTop: 16, borderTop: '1px solid rgba(20,22,26,0.10)' }}&gt;&#13;&#10;                        &lt;Text style={{ fontSize: 15, color: 'rgba(20,22,26,0.40)' }}&gt;数据模型已留位&lt;/Text&gt;&#13;&#10;                    &lt;/Box&gt;&#13;&#10;                &lt;/Box&gt;&#13;&#10;            &lt;/Box&gt;&#13;&#10;        &lt;/Box&gt;&#13;&#10;&#13;&#10;        &lt;Box style={{ position: 'absolute', left: 60, right: 60, bottom: 20, flexDirection: 'row', justifyContent: 'space-between' }}&gt;&#13;&#10;            &lt;Text style={{ fontSize: 13, color: 'rgba(20,22,26,0.40)' }}&gt;ANTIPODE · TECHATHON 2026&lt;/Text&gt;&#13;&#10;            &lt;Text style={{ fontSize: 13, color: 'rgba(20,22,26,0.40)' }}&gt;03 / 09&lt;/Text&gt;&#13;&#10;        &lt;/Box&gt;&#13;&#10;    &lt;/Box&gt;&#13;&#10;&lt;/Slide&gt;&#13;&#10;"/>
+        <p:cNvPr id="32" name=""/>
         <p:cNvGrpSpPr/>
         <p:nvPr/>
       </p:nvGrpSpPr>
@@ -1806,7 +1836,10 @@
         </p:spPr>
         <p:txBody>
           <a:bodyPr/>
-          <a:p/>
+          <a:p>
+            <a:pPr/>
+            <a:endParaRPr/>
+          </a:p>
         </p:txBody>
       </p:sp>
       <p:sp>
@@ -2007,7 +2040,10 @@
         </p:spPr>
         <p:txBody>
           <a:bodyPr/>
-          <a:p/>
+          <a:p>
+            <a:pPr/>
+            <a:endParaRPr/>
+          </a:p>
         </p:txBody>
       </p:sp>
       <p:sp>
@@ -2047,7 +2083,10 @@
         </p:spPr>
         <p:txBody>
           <a:bodyPr/>
-          <a:p/>
+          <a:p>
+            <a:pPr/>
+            <a:endParaRPr/>
+          </a:p>
         </p:txBody>
       </p:sp>
       <p:sp>
@@ -2259,7 +2298,10 @@
         </p:spPr>
         <p:txBody>
           <a:bodyPr/>
-          <a:p/>
+          <a:p>
+            <a:pPr/>
+            <a:endParaRPr/>
+          </a:p>
         </p:txBody>
       </p:sp>
       <p:sp>
@@ -2320,7 +2362,10 @@
         </p:spPr>
         <p:txBody>
           <a:bodyPr/>
-          <a:p/>
+          <a:p>
+            <a:pPr/>
+            <a:endParaRPr/>
+          </a:p>
         </p:txBody>
       </p:sp>
       <p:sp>
@@ -2362,7 +2407,10 @@
         </p:spPr>
         <p:txBody>
           <a:bodyPr/>
-          <a:p/>
+          <a:p>
+            <a:pPr/>
+            <a:endParaRPr/>
+          </a:p>
         </p:txBody>
       </p:sp>
       <p:sp>
@@ -2608,7 +2656,10 @@
         </p:spPr>
         <p:txBody>
           <a:bodyPr/>
-          <a:p/>
+          <a:p>
+            <a:pPr/>
+            <a:endParaRPr/>
+          </a:p>
         </p:txBody>
       </p:sp>
       <p:sp>
@@ -2671,7 +2722,10 @@
         </p:spPr>
         <p:txBody>
           <a:bodyPr/>
-          <a:p/>
+          <a:p>
+            <a:pPr/>
+            <a:endParaRPr/>
+          </a:p>
         </p:txBody>
       </p:sp>
       <p:sp>
@@ -2713,7 +2767,10 @@
         </p:spPr>
         <p:txBody>
           <a:bodyPr/>
-          <a:p/>
+          <a:p>
+            <a:pPr/>
+            <a:endParaRPr/>
+          </a:p>
         </p:txBody>
       </p:sp>
       <p:sp>
@@ -2959,7 +3016,10 @@
         </p:spPr>
         <p:txBody>
           <a:bodyPr/>
-          <a:p/>
+          <a:p>
+            <a:pPr/>
+            <a:endParaRPr/>
+          </a:p>
         </p:txBody>
       </p:sp>
       <p:sp>
@@ -3083,7 +3143,7 @@
   <p:cSld>
     <p:spTree>
       <p:nvGrpSpPr>
-        <p:cNvPr id="63" name="" descr="&lt;Slide style={{ width: 1280, height: 720, background: '#14161A', padding: '0px' }}&gt;&#13;&#10;    &lt;Box style={{ position: 'relative', width: 1280, height: 720, padding: '20px 60px' }}&gt;&#13;&#10;&#13;&#10;        {/* A 标题块 */}&#13;&#10;        &lt;Box style={{ height: 100, flexDirection: 'row', justifyContent: 'space-between', alignItems: 'center' }}&gt;&#13;&#10;            &lt;Box style={{ flexDirection: 'column', justifyContent: 'center' }}&gt;&#13;&#10;                &lt;Text style={{ fontSize: 13, letterSpacing: 3, color: 'rgba(247,245,240,0.45)', marginBottom: 8 }}&gt;0 3 · 产 品 形 态&lt;/Text&gt;&#13;&#10;                &lt;Text style={{ fontSize: 36, fontWeight: 'bold', color: '#F7F5F0', lineHeight: 1.25 }}&gt;一个库，两栏&lt;/Text&gt;&#13;&#10;            &lt;/Box&gt;&#13;&#10;            &lt;Box style={{ flexDirection: 'row', alignItems: 'center', gap: 12 }}&gt;&#13;&#10;                &lt;Text style={{ fontSize: 15, color: 'rgba(247,245,240,0.55)' }}&gt;反推荐&lt;/Text&gt;&#13;&#10;                &lt;Box style={{ width: 56, height: 30, borderRadius: 15, background: '#2F5BE4', flexDirection: 'row', justifyContent: 'flex-end', alignItems: 'center', padding: '0px 4px' }}&gt;&#13;&#10;                    &lt;Box style={{ width: 22, height: 22, borderRadius: 11, background: '#F7F5F0' }} /&gt;&#13;&#10;                &lt;/Box&gt;&#13;&#10;                &lt;Text style={{ fontSize: 15, fontWeight: 'bold', color: '#2F5BE4' }}&gt;开&lt;/Text&gt;&#13;&#10;            &lt;/Box&gt;&#13;&#10;        &lt;/Box&gt;&#13;&#10;&#13;&#10;        {/* B 内容区：双栏 */}&#13;&#10;        &lt;Box style={{ height: 470, flexDirection: 'row', gap: 34 }}&gt;&#13;&#10;&#13;&#10;            {/* 左：仓库 */}&#13;&#10;            &lt;Box style={{ width: 500, flexDirection: 'column' }}&gt;&#13;&#10;                &lt;Box style={{ flexDirection: 'row', alignItems: 'baseline', gap: 10, marginBottom: 12 }}&gt;&#13;&#10;                    &lt;Text style={{ fontSize: 20, fontWeight: 'bold', color: 'rgba(247,245,240,0.75)' }}&gt;仓库&lt;/Text&gt;&#13;&#10;                    &lt;Text style={{ fontSize: 14, color: 'rgba(247,245,240,0.35)' }}&gt;用户关注、已省流&lt;/Text&gt;&#13;&#10;                &lt;/Box&gt;&#13;&#10;&#13;&#10;                &lt;Box style={{ background: 'rgba(247,245,240,0.06)', border: '1px solid rgba(247,245,240,0.10)', borderRadius: 10, padding: '13px 16px', marginBottom: 10 }}&gt;&#13;&#10;                    &lt;Text style={{ fontSize: 17, fontWeight: 'bold', color: '#F7F5F0', lineHeight: 1.4 }}&gt;我们把单体拆成微服务，两年后的复盘&lt;/Text&gt;&#13;&#10;                    &lt;Text style={{ fontSize: 13, color: 'rgba(247,245,240,0.42)', marginTop: 5 }}&gt;支持 · 微服务　｜　微服务 vs 单体&lt;/Text&gt;&#13;&#10;                    &lt;Text style={{ fontSize: 14, color: 'rgba(247,245,240,0.62)', marginTop: 7, lineHeight: 1.5 }}&gt;拆出七个服务后可独立发布、新人上手更快，作者结论是值得。&lt;/Text&gt;&#13;&#10;                &lt;/Box&gt;&#13;&#10;&#13;&#10;                &lt;Box style={{ background: 'rgba(247,245,240,0.06)', border: '1px solid rgba(247,245,240,0.10)', borderRadius: 10, padding: '13px 16px', marginBottom: 10 }}&gt;&#13;&#10;                    &lt;Text style={{ fontSize: 17, fontWeight: 'bold', color: '#F7F5F0', lineHeight: 1.4 }}&gt;坚持 TDD 三年，我的真实体会&lt;/Text&gt;&#13;&#10;                    &lt;Text style={{ fontSize: 13, color: 'rgba(247,245,240,0.42)', marginTop: 5 }}&gt;支持 · 先写测试　｜　测试驱动开发是否必要&lt;/Text&gt;&#13;&#10;                    &lt;Text style={{ fontSize: 14, color: 'rgba(247,245,240,0.62)', marginTop: 7, lineHeight: 1.5 }}&gt;回归缺陷从每月四五个降到一年两三个，作者认为长期回本。&lt;/Text&gt;&#13;&#10;                &lt;/Box&gt;&#13;&#10;&#13;&#10;                &lt;Box style={{ background: 'rgba(247,245,240,0.06)', border: '1px solid rgba(247,245,240,0.10)', borderRadius: 10, padding: '13px 16px' }}&gt;&#13;&#10;                    &lt;Text style={{ fontSize: 17, fontWeight: 'bold', color: '#F7F5F0', lineHeight: 1.4 }}&gt;为什么我们最终选了 React&lt;/Text&gt;&#13;&#10;                    &lt;Text style={{ fontSize: 13, color: 'rgba(247,245,240,0.42)', marginTop: 5 }}&gt;支持 · React　｜　React vs Vue&lt;/Text&gt;&#13;&#10;                    &lt;Text style={{ fontSize: 14, color: 'rgba(247,245,240,0.62)', marginTop: 7, lineHeight: 1.5 }}&gt;生态与招人成本最终压过了框架本身的手感差异。&lt;/Text&gt;&#13;&#10;                &lt;/Box&gt;&#13;&#10;            &lt;/Box&gt;&#13;&#10;&#13;&#10;            {/* 中：箭头 */}&#13;&#10;            &lt;Box style={{ width: 40, justifyContent: 'center', alignItems: 'center' }}&gt;&#13;&#10;                &lt;Text style={{ fontSize: 22, color: 'rgba(247,245,240,0.25)' }}&gt;→&lt;/Text&gt;&#13;&#10;            &lt;/Box&gt;&#13;&#10;&#13;&#10;            {/* 右：反仓库 */}&#13;&#10;            &lt;Box style={{ width: 520, flexDirection: 'column' }}&gt;&#13;&#10;                &lt;Box style={{ flexDirection: 'row', alignItems: 'baseline', gap: 10, marginBottom: 12 }}&gt;&#13;&#10;                    &lt;Text style={{ fontSize: 20, fontWeight: 'bold', color: '#C2410C' }}&gt;反仓库&lt;/Text&gt;&#13;&#10;                    &lt;Text style={{ fontSize: 14, color: 'rgba(247,245,240,0.35)' }}&gt;同议题、反立场、带原文出处&lt;/Text&gt;&#13;&#10;                &lt;/Box&gt;&#13;&#10;&#13;&#10;                &lt;Box style={{ background: 'rgba(247,245,240,0.06)', borderLeft: '3px solid #C2410C', borderRadius: 10, padding: '12px 16px', marginBottom: 9 }}&gt;&#13;&#10;                    &lt;Text style={{ fontSize: 16, fontWeight: 'bold', color: '#F7F5F0', lineHeight: 1.4 }}&gt;从微服务走向单体化&lt;/Text&gt;&#13;&#10;                    &lt;Text style={{ fontSize: 12.5, color: 'rgba(247,245,240,0.48)', marginTop: 4 }}&gt;站 · 单体　｜　对立度 0.95　｜　v2ex.com&lt;/Text&gt;&#13;&#10;                    &lt;Text style={{ fontSize: 13.5, color: 'rgba(247,245,240,0.58)', marginTop: 6, lineHeight: 1.5 }}&gt;「CEO 觉得微服务部署极其繁琐……要求把十来个微服务合并成一个。」&lt;/Text&gt;&#13;&#10;                &lt;/Box&gt;&#13;&#10;&#13;&#10;                &lt;Box style={{ background: 'rgba(247,245,240,0.06)', borderLeft: '3px solid #C2410C', borderRadius: 10, padding: '12px 16px', marginBottom: 9 }}&gt;&#13;&#10;                    &lt;Text style={{ fontSize: 16, fontWeight: 'bold', color: '#F7F5F0', lineHeight: 1.4 }}&gt;微服务的缺点&lt;/Text&gt;&#13;&#10;                    &lt;Text style={{ fontSize: 12.5, color: 'rgba(247,245,240,0.48)', marginTop: 4 }}&gt;站 · 单体　｜　对立度 0.95　｜　v2ex.com&lt;/Text&gt;&#13;&#10;                    &lt;Text style={{ fontSize: 13.5, color: 'rgba(247,245,240,0.58)', marginTop: 6, lineHeight: 1.5 }}&gt;「网络调用过多、运维成本高、易瘫痪」—— 与「高可用」叙事正面冲突。&lt;/Text&gt;&#13;&#10;                &lt;/Box&gt;&#13;&#10;&#13;&#10;                &lt;Box style={{ background: 'rgba(247,245,240,0.06)', borderLeft: '3px solid #C2410C', borderRadius: 10, padding: '12px 16px' }}&gt;&#13;&#10;                    &lt;Text style={{ fontSize: 16, fontWeight: 'bold', color: '#F7F5F0', lineHeight: 1.4 }}&gt;经技术选型研究，我们放弃了 React，转向 Vue&lt;/Text&gt;&#13;&#10;                    &lt;Text style={{ fontSize: 12.5, color: 'rgba(247,245,240,0.48)', marginTop: 4 }}&gt;站 · Vue　｜　对立度 1.00　｜　v2ex.com&lt;/Text&gt;&#13;&#10;                    &lt;Text style={{ fontSize: 13.5, color: 'rgba(247,245,240,0.58)', marginTop: 6, lineHeight: 1.5 }}&gt;同一个选型问题，相反结论 —— 而且是作者亲历的项目复盘。&lt;/Text&gt;&#13;&#10;                &lt;/Box&gt;&#13;&#10;            &lt;/Box&gt;&#13;&#10;        &lt;/Box&gt;&#13;&#10;&#13;&#10;        {/* 底部说明 */}&#13;&#10;        &lt;Box style={{ position: 'absolute', left: 60, right: 60, bottom: 58, flexDirection: 'row', justifyContent: 'space-between', alignItems: 'center' }}&gt;&#13;&#10;            &lt;Text style={{ fontSize: 15, color: 'rgba(247,245,240,0.55)' }}&gt;&#13;&#10;                反库物理独立存放，靠条目 id 与原条目对应 —— 不是「混在信息流里推点反对意见」&#13;&#10;            &lt;/Text&gt;&#13;&#10;            &lt;Text style={{ fontSize: 15, color: '#C2410C' }}&gt;每条都能点回原文&lt;/Text&gt;&#13;&#10;        &lt;/Box&gt;&#13;&#10;&#13;&#10;        &lt;Box style={{ position: 'absolute', left: 60, right: 60, bottom: 20, flexDirection: 'row', justifyContent: 'space-between' }}&gt;&#13;&#10;            &lt;Text style={{ fontSize: 13, color: 'rgba(247,245,240,0.30)' }}&gt;ANTIPODE · TECHATHON 2026&lt;/Text&gt;&#13;&#10;            &lt;Text style={{ fontSize: 13, color: 'rgba(247,245,240,0.30)' }}&gt;04 / 09&lt;/Text&gt;&#13;&#10;        &lt;/Box&gt;&#13;&#10;    &lt;/Box&gt;&#13;&#10;&lt;/Slide&gt;&#13;&#10;"/>
+        <p:cNvPr id="63" name="" descr="&lt;Slide style={{ width: 1280, height: 720, background: '#14161A', padding: '0px' }}&gt;&#13;&#10;    &lt;Box style={{ position: 'relative', width: 1280, height: 720, padding: '20px 60px' }}&gt;&#13;&#10;&#13;&#10;        {/* A 标题块 */}&#13;&#10;        &lt;Box style={{ height: 100, flexDirection: 'row', justifyContent: 'space-between', alignItems: 'center' }}&gt;&#13;&#10;            &lt;Box style={{ flexDirection: 'column', justifyContent: 'center' }}&gt;&#13;&#10;                &lt;Text style={{ fontSize: 13, letterSpacing: 3, color: 'rgba(247,245,240,0.45)', marginBottom: 8 }}&gt;0 3 · 产 品 形 态&lt;/Text&gt;&#13;&#10;                &lt;Text style={{ fontSize: 36, fontWeight: 'bold', color: '#F7F5F0', lineHeight: 1.25 }}&gt;一个库，两栏&lt;/Text&gt;&#13;&#10;            &lt;/Box&gt;&#13;&#10;            &lt;Box style={{ flexDirection: 'row', alignItems: 'center', gap: 12 }}&gt;&#13;&#10;                &lt;Text style={{ fontSize: 15, color: 'rgba(247,245,240,0.55)' }}&gt;反推荐&lt;/Text&gt;&#13;&#10;                &lt;Box style={{ width: 56, height: 30, borderRadius: 15, background: '#2F5BE4', flexDirection: 'row', justifyContent: 'flex-end', alignItems: 'center', padding: '0px 4px' }}&gt;&#13;&#10;                    &lt;Box style={{ width: 22, height: 22, borderRadius: 11, background: '#F7F5F0' }} /&gt;&#13;&#10;                &lt;/Box&gt;&#13;&#10;                &lt;Text style={{ fontSize: 15, fontWeight: 'bold', color: '#2F5BE4' }}&gt;开&lt;/Text&gt;&#13;&#10;            &lt;/Box&gt;&#13;&#10;        &lt;/Box&gt;&#13;&#10;&#13;&#10;        {/* B 内容区：双栏 */}&#13;&#10;        &lt;Box style={{ height: 470, flexDirection: 'row', gap: 34 }}&gt;&#13;&#10;&#13;&#10;            {/* 左：仓库 */}&#13;&#10;            &lt;Box style={{ width: 500, flexDirection: 'column' }}&gt;&#13;&#10;                &lt;Box style={{ flexDirection: 'row', alignItems: 'baseline', gap: 10, marginBottom: 12 }}&gt;&#13;&#10;                    &lt;Text style={{ fontSize: 20, fontWeight: 'bold', color: 'rgba(247,245,240,0.75)' }}&gt;仓库&lt;/Text&gt;&#13;&#10;                    &lt;Text style={{ fontSize: 14, color: 'rgba(247,245,240,0.35)' }}&gt;客户主页 + 账号读出 · 已省流&lt;/Text&gt;&#13;&#10;                &lt;/Box&gt;&#13;&#10;&#13;&#10;                &lt;Box style={{ background: 'rgba(247,245,240,0.06)', border: '1px solid rgba(247,245,240,0.10)', borderRadius: 10, padding: '13px 16px', marginBottom: 10 }}&gt;&#13;&#10;                    &lt;Text style={{ fontSize: 17, fontWeight: 'bold', color: '#F7F5F0', lineHeight: 1.4 }}&gt;我们把单体拆成微服务，两年后的复盘&lt;/Text&gt;&#13;&#10;                    &lt;Text style={{ fontSize: 13, color: 'rgba(247,245,240,0.42)', marginTop: 5 }}&gt;支持 · 微服务　｜　微服务 vs 单体&lt;/Text&gt;&#13;&#10;                    &lt;Text style={{ fontSize: 14, color: 'rgba(247,245,240,0.62)', marginTop: 7, lineHeight: 1.5 }}&gt;拆出七个服务后可独立发布、新人上手更快，作者结论是值得。&lt;/Text&gt;&#13;&#10;                &lt;/Box&gt;&#13;&#10;&#13;&#10;                &lt;Box style={{ background: 'rgba(247,245,240,0.06)', border: '1px solid rgba(247,245,240,0.10)', borderRadius: 10, padding: '13px 16px', marginBottom: 10 }}&gt;&#13;&#10;                    &lt;Text style={{ fontSize: 17, fontWeight: 'bold', color: '#F7F5F0', lineHeight: 1.4 }}&gt;坚持 TDD 三年，我的真实体会&lt;/Text&gt;&#13;&#10;                    &lt;Text style={{ fontSize: 13, color: 'rgba(247,245,240,0.42)', marginTop: 5 }}&gt;支持 · 先写测试　｜　测试驱动开发是否必要&lt;/Text&gt;&#13;&#10;                    &lt;Text style={{ fontSize: 14, color: 'rgba(247,245,240,0.62)', marginTop: 7, lineHeight: 1.5 }}&gt;回归缺陷从每月四五个降到一年两三个，作者认为长期回本。&lt;/Text&gt;&#13;&#10;                &lt;/Box&gt;&#13;&#10;&#13;&#10;                &lt;Box style={{ background: 'rgba(247,245,240,0.06)', border: '1px solid rgba(247,245,240,0.10)', borderRadius: 10, padding: '13px 16px' }}&gt;&#13;&#10;                    &lt;Text style={{ fontSize: 17, fontWeight: 'bold', color: '#F7F5F0', lineHeight: 1.4 }}&gt;为什么我们最终选了 React&lt;/Text&gt;&#13;&#10;                    &lt;Text style={{ fontSize: 13, color: 'rgba(247,245,240,0.42)', marginTop: 5 }}&gt;支持 · React　｜　React vs Vue&lt;/Text&gt;&#13;&#10;                    &lt;Text style={{ fontSize: 14, color: 'rgba(247,245,240,0.62)', marginTop: 7, lineHeight: 1.5 }}&gt;生态与招人成本最终压过了框架本身的手感差异。&lt;/Text&gt;&#13;&#10;                &lt;/Box&gt;&#13;&#10;            &lt;/Box&gt;&#13;&#10;&#13;&#10;            {/* 中：箭头 */}&#13;&#10;            &lt;Box style={{ width: 40, justifyContent: 'center', alignItems: 'center' }}&gt;&#13;&#10;                &lt;Text style={{ fontSize: 22, color: 'rgba(247,245,240,0.25)' }}&gt;→&lt;/Text&gt;&#13;&#10;            &lt;/Box&gt;&#13;&#10;&#13;&#10;            {/* 右：反仓库 */}&#13;&#10;            &lt;Box style={{ width: 520, flexDirection: 'column' }}&gt;&#13;&#10;                &lt;Box style={{ flexDirection: 'row', alignItems: 'baseline', gap: 10, marginBottom: 12 }}&gt;&#13;&#10;                    &lt;Text style={{ fontSize: 20, fontWeight: 'bold', color: '#C2410C' }}&gt;反仓库&lt;/Text&gt;&#13;&#10;                    &lt;Text style={{ fontSize: 14, color: 'rgba(247,245,240,0.35)' }}&gt;同议题、反立场、带原文出处&lt;/Text&gt;&#13;&#10;                &lt;/Box&gt;&#13;&#10;&#13;&#10;                &lt;Box style={{ background: 'rgba(247,245,240,0.06)', borderLeft: '3px solid #C2410C', borderRadius: 10, padding: '12px 16px', marginBottom: 9 }}&gt;&#13;&#10;                    &lt;Text style={{ fontSize: 16, fontWeight: 'bold', color: '#F7F5F0', lineHeight: 1.4 }}&gt;从微服务走向单体化&lt;/Text&gt;&#13;&#10;                    &lt;Text style={{ fontSize: 12.5, color: 'rgba(247,245,240,0.48)', marginTop: 4 }}&gt;站 · 单体　｜　对立度 0.95　｜　v2ex.com&lt;/Text&gt;&#13;&#10;                    &lt;Text style={{ fontSize: 13.5, color: 'rgba(247,245,240,0.58)', marginTop: 6, lineHeight: 1.5 }}&gt;「CEO 觉得微服务部署极其繁琐……要求把十来个微服务合并成一个。」&lt;/Text&gt;&#13;&#10;                &lt;/Box&gt;&#13;&#10;&#13;&#10;                &lt;Box style={{ background: 'rgba(247,245,240,0.06)', borderLeft: '3px solid #C2410C', borderRadius: 10, padding: '12px 16px', marginBottom: 9 }}&gt;&#13;&#10;                    &lt;Text style={{ fontSize: 16, fontWeight: 'bold', color: '#F7F5F0', lineHeight: 1.4 }}&gt;微服务的缺点&lt;/Text&gt;&#13;&#10;                    &lt;Text style={{ fontSize: 12.5, color: 'rgba(247,245,240,0.48)', marginTop: 4 }}&gt;站 · 单体　｜　对立度 0.95　｜　v2ex.com&lt;/Text&gt;&#13;&#10;                    &lt;Text style={{ fontSize: 13.5, color: 'rgba(247,245,240,0.58)', marginTop: 6, lineHeight: 1.5 }}&gt;「网络调用过多、运维成本高、易瘫痪」—— 与「高可用」叙事正面冲突。&lt;/Text&gt;&#13;&#10;                &lt;/Box&gt;&#13;&#10;&#13;&#10;                &lt;Box style={{ background: 'rgba(247,245,240,0.06)', borderLeft: '3px solid #C2410C', borderRadius: 10, padding: '12px 16px' }}&gt;&#13;&#10;                    &lt;Text style={{ fontSize: 16, fontWeight: 'bold', color: '#F7F5F0', lineHeight: 1.4 }}&gt;经技术选型研究，我们放弃了 React，转向 Vue&lt;/Text&gt;&#13;&#10;                    &lt;Text style={{ fontSize: 12.5, color: 'rgba(247,245,240,0.48)', marginTop: 4 }}&gt;站 · Vue　｜　对立度 1.00　｜　v2ex.com&lt;/Text&gt;&#13;&#10;                    &lt;Text style={{ fontSize: 13.5, color: 'rgba(247,245,240,0.58)', marginTop: 6, lineHeight: 1.5 }}&gt;同一个选型问题，相反结论 —— 而且是作者亲历的项目复盘。&lt;/Text&gt;&#13;&#10;                &lt;/Box&gt;&#13;&#10;            &lt;/Box&gt;&#13;&#10;        &lt;/Box&gt;&#13;&#10;&#13;&#10;        {/* 底部说明 */}&#13;&#10;        &lt;Box style={{ position: 'absolute', left: 60, right: 60, bottom: 58, flexDirection: 'row', justifyContent: 'space-between', alignItems: 'center' }}&gt;&#13;&#10;            &lt;Text style={{ fontSize: 15, color: 'rgba(247,245,240,0.55)' }}&gt;&#13;&#10;                反库物理独立存放，靠条目 id 与原条目对应 —— 不是「混在信息流里推点反对意见」&#13;&#10;            &lt;/Text&gt;&#13;&#10;            &lt;Text style={{ fontSize: 15, color: '#C2410C' }}&gt;每条都能点回原文&lt;/Text&gt;&#13;&#10;        &lt;/Box&gt;&#13;&#10;&#13;&#10;        &lt;Box style={{ position: 'absolute', left: 60, right: 60, bottom: 20, flexDirection: 'row', justifyContent: 'space-between' }}&gt;&#13;&#10;            &lt;Text style={{ fontSize: 13, color: 'rgba(247,245,240,0.30)' }}&gt;ANTIPODE · TECHATHON 2026&lt;/Text&gt;&#13;&#10;            &lt;Text style={{ fontSize: 13, color: 'rgba(247,245,240,0.30)' }}&gt;04 / 09&lt;/Text&gt;&#13;&#10;        &lt;/Box&gt;&#13;&#10;    &lt;/Box&gt;&#13;&#10;&lt;/Slide&gt;&#13;&#10;"/>
         <p:cNvGrpSpPr/>
         <p:nvPr/>
       </p:nvGrpSpPr>
@@ -3445,7 +3505,7 @@
         <p:spPr>
           <a:xfrm rot="0" flipH="0" flipV="0">
             <a:off x="1047750" y="1143000"/>
-            <a:ext cx="1066800" cy="228600"/>
+            <a:ext cx="1762125" cy="228600"/>
           </a:xfrm>
           <a:prstGeom prst="rect"/>
         </p:spPr>
@@ -3467,7 +3527,55 @@
                 <a:latin typeface="Microsoft YaHei"/>
                 <a:ea typeface="Microsoft YaHei"/>
               </a:rPr>
-              <a:t>用户关注、已省流</a:t>
+              <a:t>客户主页</a:t>
+            </a:r>
+            <a:r>
+              <a:rPr lang="en-US" sz="1050">
+                <a:solidFill>
+                  <a:srgbClr val="F7F5F0">
+                    <a:alpha val="35000"/>
+                  </a:srgbClr>
+                </a:solidFill>
+                <a:latin typeface="Microsoft YaHei"/>
+                <a:ea typeface="Microsoft YaHei"/>
+              </a:rPr>
+              <a:t xml:space="preserve"> + </a:t>
+            </a:r>
+            <a:r>
+              <a:rPr lang="zh-CN" sz="1050">
+                <a:solidFill>
+                  <a:srgbClr val="F7F5F0">
+                    <a:alpha val="35000"/>
+                  </a:srgbClr>
+                </a:solidFill>
+                <a:latin typeface="Microsoft YaHei"/>
+                <a:ea typeface="Microsoft YaHei"/>
+              </a:rPr>
+              <a:t>账号读出</a:t>
+            </a:r>
+            <a:r>
+              <a:rPr lang="en-US" sz="1050">
+                <a:solidFill>
+                  <a:srgbClr val="F7F5F0">
+                    <a:alpha val="35000"/>
+                  </a:srgbClr>
+                </a:solidFill>
+                <a:latin typeface="Microsoft YaHei"/>
+                <a:ea typeface="Microsoft YaHei"/>
+              </a:rPr>
+              <a:t xml:space="preserve"> · </a:t>
+            </a:r>
+            <a:r>
+              <a:rPr lang="zh-CN" sz="1050">
+                <a:solidFill>
+                  <a:srgbClr val="F7F5F0">
+                    <a:alpha val="35000"/>
+                  </a:srgbClr>
+                </a:solidFill>
+                <a:latin typeface="Microsoft YaHei"/>
+                <a:ea typeface="Microsoft YaHei"/>
+              </a:rPr>
+              <a:t>已省流</a:t>
             </a:r>
             <a:endParaRPr/>
           </a:p>
@@ -5220,7 +5328,7 @@
   <p:cSld>
     <p:spTree>
       <p:nvGrpSpPr>
-        <p:cNvPr id="107" name="" descr="&lt;Slide style={{ width: 1280, height: 720, background: '#F7F5F0', padding: '0px' }}&gt;&#13;&#10;    &lt;Box style={{ position: 'relative', width: 1280, height: 720, padding: '20px 60px' }}&gt;&#13;&#10;&#13;&#10;        &lt;Box style={{ height: 150, flexDirection: 'column', justifyContent: 'flex-end' }}&gt;&#13;&#10;            &lt;Text style={{ fontSize: 13, letterSpacing: 3, color: '#2F5BE4', marginBottom: 10 }}&gt;0 4 · 技 术 铁 律&lt;/Text&gt;&#13;&#10;            &lt;Text style={{ fontSize: 40, fontWeight: 'bold', color: '#14161A', lineHeight: 1.3 }}&gt;&#13;&#10;                模型只负责&lt;span style={{ color: '#2F5BE4' }}&gt;提问&lt;/span&gt;，答案必须来自&lt;span style={{ color: '#2F5BE4' }}&gt;真实检索&lt;/span&gt;。&#13;&#10;            &lt;/Text&gt;&#13;&#10;        &lt;/Box&gt;&#13;&#10;&#13;&#10;        &lt;Box style={{ height: 470 }}&gt;&#13;&#10;            &lt;Text style={{ fontSize: 20, color: 'rgba(20,22,26,0.60)', marginBottom: 34 }}&gt;&#13;&#10;                这是防幻觉唯一可靠的方式 —— 也是我们宁可产出少、也不刷数量的原因。&#13;&#10;            &lt;/Text&gt;&#13;&#10;&#13;&#10;            &lt;Box style={{ flexDirection: 'row', alignItems: 'flex-start', gap: 14 }}&gt;&#13;&#10;&#13;&#10;                &lt;Box style={{ width: 330, flexDirection: 'column' }}&gt;&#13;&#10;                    &lt;Text style={{ fontSize: 15, fontWeight: 'bold', color: '#2F5BE4', letterSpacing: 2 }}&gt;STEP 1&lt;/Text&gt;&#13;&#10;                    &lt;Text style={{ fontSize: 25, fontWeight: 'bold', color: '#14161A', marginTop: 8 }}&gt;模型判立场&lt;/Text&gt;&#13;&#10;                    &lt;Text style={{ fontSize: 17, color: 'rgba(20,22,26,0.65)', marginTop: 10, lineHeight: 1.6 }}&gt;&#13;&#10;                        只回答「这段文本站在二元议题的哪一边」，不产出任何内容。&#13;&#10;                    &lt;/Text&gt;&#13;&#10;                &lt;/Box&gt;&#13;&#10;&#13;&#10;                &lt;Box style={{ width: 34, alignItems: 'center', paddingTop: 30 }}&gt;&#13;&#10;                    &lt;Text style={{ fontSize: 22, color: 'rgba(20,22,26,0.25)' }}&gt;→&lt;/Text&gt;&#13;&#10;                &lt;/Box&gt;&#13;&#10;&#13;&#10;                &lt;Box style={{ width: 330, flexDirection: 'column' }}&gt;&#13;&#10;                    &lt;Text style={{ fontSize: 15, fontWeight: 'bold', color: '#2F5BE4', letterSpacing: 2 }}&gt;STEP 2&lt;/Text&gt;&#13;&#10;                    &lt;Text style={{ fontSize: 25, fontWeight: 'bold', color: '#14161A', marginTop: 8 }}&gt;去真实源检索&lt;/Text&gt;&#13;&#10;                    &lt;Text style={{ fontSize: 17, color: 'rgba(20,22,26,0.65)', marginTop: 10, lineHeight: 1.6 }}&gt;&#13;&#10;                        拿议题词去 V2EX / 掘金 / CSDN 抓真实帖子，候选必须带可访问 URL。&#13;&#10;                    &lt;/Text&gt;&#13;&#10;                &lt;/Box&gt;&#13;&#10;&#13;&#10;                &lt;Box style={{ width: 34, alignItems: 'center', paddingTop: 30 }}&gt;&#13;&#10;                    &lt;Text style={{ fontSize: 22, color: 'rgba(20,22,26,0.25)' }}&gt;→&lt;/Text&gt;&#13;&#10;                &lt;/Box&gt;&#13;&#10;&#13;&#10;                &lt;Box style={{ width: 330, flexDirection: 'column' }}&gt;&#13;&#10;                    &lt;Text style={{ fontSize: 15, fontWeight: 'bold', color: '#C2410C', letterSpacing: 2 }}&gt;STEP 3&lt;/Text&gt;&#13;&#10;                    &lt;Text style={{ fontSize: 25, fontWeight: 'bold', color: '#14161A', marginTop: 8 }}&gt;证据必须可校验&lt;/Text&gt;&#13;&#10;                    &lt;Text style={{ fontSize: 17, color: 'rgba(20,22,26,0.65)', marginTop: 10, lineHeight: 1.6 }}&gt;&#13;&#10;                        &lt;span style={{ fontWeight: 'bold' }}&gt;证据必须是原文的真实子串&lt;/span&gt;，对不上就丢，不降级。&#13;&#10;                    &lt;/Text&gt;&#13;&#10;                &lt;/Box&gt;&#13;&#10;            &lt;/Box&gt;&#13;&#10;&#13;&#10;            &lt;Box style={{ marginTop: 52, paddingTop: 20, borderTop: '1px solid rgba(20,22,26,0.10)', flexDirection: 'row', alignItems: 'center', gap: 20 }}&gt;&#13;&#10;                &lt;Text style={{ fontSize: 15, fontWeight: 'bold', color: '#C2410C', width: 96 }}&gt;我们拒绝&lt;/Text&gt;&#13;&#10;                &lt;Text style={{ fontSize: 19, color: 'rgba(20,22,26,0.62)', flex: 1, lineHeight: 1.6 }}&gt;&#13;&#10;                    让模型「写一段反对意见」再去配个链接 —— 写得越像，越难被发现是编的。&#13;&#10;                &lt;/Text&gt;&#13;&#10;            &lt;/Box&gt;&#13;&#10;            &lt;Box style={{ marginTop: 26, background: '#14161A', borderRadius: 8, padding: '16px 20px', flexDirection: 'column' }}&gt;&#13;&#10;                &lt;Text style={{ fontSize: 13, color: 'rgba(247,245,240,0.45)', letterSpacing: 1 }}&gt;抽出来的一条证据（可直接核对）&lt;/Text&gt;&#13;&#10;                &lt;Text style={{ fontSize: 15, color: 'rgba(247,245,240,0.88)', marginTop: 6, lineHeight: 1.5 }}&gt;&#13;&#10;                    evidence_span = 「CEO 觉得微服务部署极其繁琐……要求把十来个微服务合并成一个」&#13;&#10;                &lt;/Text&gt;&#13;&#10;                &lt;Box style={{ flexDirection: 'row', justifyContent: 'space-between', marginTop: 8 }}&gt;&#13;&#10;                    &lt;Text style={{ fontSize: 13, color: 'rgba(247,245,240,0.45)' }}&gt;https://www.v2ex.com/t/1106152&lt;/Text&gt;&#13;&#10;                    &lt;Text style={{ fontSize: 13, fontWeight: 'bold', color: '#2F5BE4' }}&gt;校验通过：与原文逐字一致&lt;/Text&gt;&#13;&#10;                &lt;/Box&gt;&#13;&#10;            &lt;/Box&gt;&#13;&#10;        &lt;/Box&gt;&#13;&#10;&#13;&#10;        &lt;Box style={{ position: 'absolute', left: 60, right: 60, bottom: 20, flexDirection: 'row', justifyContent: 'space-between' }}&gt;&#13;&#10;            &lt;Text style={{ fontSize: 13, color: 'rgba(20,22,26,0.40)' }}&gt;ANTIPODE · TECHATHON 2026&lt;/Text&gt;&#13;&#10;            &lt;Text style={{ fontSize: 13, color: 'rgba(20,22,26,0.40)' }}&gt;05 / 09&lt;/Text&gt;&#13;&#10;        &lt;/Box&gt;&#13;&#10;    &lt;/Box&gt;&#13;&#10;&lt;/Slide&gt;&#13;&#10;"/>
+        <p:cNvPr id="107" name=""/>
         <p:cNvGrpSpPr/>
         <p:nvPr/>
       </p:nvGrpSpPr>
@@ -5253,7 +5361,10 @@
         </p:spPr>
         <p:txBody>
           <a:bodyPr/>
-          <a:p/>
+          <a:p>
+            <a:pPr/>
+            <a:endParaRPr/>
+          </a:p>
         </p:txBody>
       </p:sp>
       <p:sp>
@@ -6021,7 +6132,10 @@
         </p:spPr>
         <p:txBody>
           <a:bodyPr/>
-          <a:p/>
+          <a:p>
+            <a:pPr/>
+            <a:endParaRPr/>
+          </a:p>
         </p:txBody>
       </p:sp>
       <p:sp>
@@ -6143,7 +6257,10 @@
         </p:spPr>
         <p:txBody>
           <a:bodyPr/>
-          <a:p/>
+          <a:p>
+            <a:pPr/>
+            <a:endParaRPr/>
+          </a:p>
         </p:txBody>
       </p:sp>
       <p:sp>
@@ -6412,7 +6529,7 @@
   <p:cSld>
     <p:spTree>
       <p:nvGrpSpPr>
-        <p:cNvPr id="133" name="" descr="&lt;Slide style={{ width: 1280, height: 720, background: '#F7F5F0', padding: '0px' }}&gt;&#13;&#10;    &lt;Box style={{ position: 'relative', width: 1280, height: 720, padding: '20px 60px' }}&gt;&#13;&#10;&#13;&#10;        &lt;Box style={{ height: 110, flexDirection: 'column', justifyContent: 'flex-end' }}&gt;&#13;&#10;            &lt;Text style={{ fontSize: 13, letterSpacing: 3, color: '#2F5BE4', marginBottom: 10 }}&gt;0 5 · 漏 斗（真实一次整库运行）&lt;/Text&gt;&#13;&#10;            &lt;Text style={{ fontSize: 38, fontWeight: 'bold', color: '#14161A', lineHeight: 1.25 }}&gt;&#13;&#10;                184 个候选，最后留下 &lt;span style={{ color: '#C2410C' }}&gt;6&lt;/span&gt; 条&#13;&#10;            &lt;/Text&gt;&#13;&#10;        &lt;/Box&gt;&#13;&#10;&#13;&#10;        &lt;Box style={{ height: 510, flexDirection: 'row', gap: 48 }}&gt;&#13;&#10;&#13;&#10;            {/* 左：漏斗 */}&#13;&#10;            &lt;Box style={{ width: 640, flexDirection: 'column', paddingTop: 8 }}&gt;&#13;&#10;&#13;&#10;                &lt;Box style={{ flexDirection: 'row', alignItems: 'center', gap: 22, marginBottom: 30 }}&gt;&#13;&#10;                    &lt;Text style={{ width: 130, fontSize: 72, fontWeight: 'bold', color: '#14161A', lineHeight: 1.0 }}&gt;184&lt;/Text&gt;&#13;&#10;                    &lt;Box style={{ flex: 1, flexDirection: 'column' }}&gt;&#13;&#10;                        &lt;Text style={{ fontSize: 16, color: 'rgba(20,22,26,0.55)', marginBottom: 8 }}&gt;检索候选&lt;/Text&gt;&#13;&#10;                        &lt;Box style={{ height: 14, background: '#2F5BE4', borderRadius: 2 }} /&gt;&#13;&#10;                    &lt;/Box&gt;&#13;&#10;                &lt;/Box&gt;&#13;&#10;&#13;&#10;                &lt;Box style={{ flexDirection: 'row', alignItems: 'center', gap: 22, marginBottom: 30 }}&gt;&#13;&#10;                    &lt;Text style={{ width: 130, fontSize: 72, fontWeight: 'bold', color: '#14161A', lineHeight: 1.0 }}&gt;56&lt;/Text&gt;&#13;&#10;                    &lt;Box style={{ flex: 1, flexDirection: 'column' }}&gt;&#13;&#10;                        &lt;Text style={{ fontSize: 16, color: 'rgba(20,22,26,0.55)', marginBottom: 8 }}&gt;粗筛后送模型判定&lt;/Text&gt;&#13;&#10;                        &lt;Box style={{ height: 14, background: 'rgba(47,91,228,0.45)', width: 195, borderRadius: 2 }} /&gt;&#13;&#10;                    &lt;/Box&gt;&#13;&#10;                &lt;/Box&gt;&#13;&#10;&#13;&#10;                &lt;Box style={{ flexDirection: 'row', alignItems: 'center', gap: 22 }}&gt;&#13;&#10;                    &lt;Text style={{ width: 130, fontSize: 72, fontWeight: 'bold', color: '#C2410C', lineHeight: 1.0 }}&gt;6&lt;/Text&gt;&#13;&#10;                    &lt;Box style={{ flex: 1, flexDirection: 'column' }}&gt;&#13;&#10;                        &lt;Text style={{ fontSize: 16, color: 'rgba(20,22,26,0.55)', marginBottom: 8 }}&gt;通过六道闸门，写入反库&lt;/Text&gt;&#13;&#10;                        &lt;Box style={{ height: 14, background: '#C2410C', width: 21, borderRadius: 2 }} /&gt;&#13;&#10;                    &lt;/Box&gt;&#13;&#10;                &lt;/Box&gt;&#13;&#10;&#13;&#10;                &lt;Box style={{ marginTop: 44, paddingTop: 18, borderTop: '1px solid rgba(20,22,26,0.10)' }}&gt;&#13;&#10;                    &lt;Text style={{ fontSize: 16, color: 'rgba(20,22,26,0.60)', lineHeight: 1.6 }}&gt;&#13;&#10;                        3.3% 的留存率不是失败 —— &lt;span style={{ fontWeight: 'bold', color: '#14161A' }}&gt;留下的每一条都能点回原文&lt;/span&gt;。&#13;&#10;                    &lt;/Text&gt;&#13;&#10;                &lt;/Box&gt;&#13;&#10;            &lt;/Box&gt;&#13;&#10;&#13;&#10;            {/* 右：拒因 */}&#13;&#10;            &lt;Box style={{ width: 400, flexDirection: 'column', paddingTop: 8 }}&gt;&#13;&#10;                &lt;Text style={{ fontSize: 15, fontWeight: 'bold', color: 'rgba(20,22,26,0.45)', letterSpacing: 2, marginBottom: 16 }}&gt;&#13;&#10;                    拒因（部分）&#13;&#10;                &lt;/Text&gt;&#13;&#10;&#13;&#10;                &lt;Box style={{ flexDirection: 'row', justifyContent: 'space-between', paddingBottom: 12, borderBottom: '1px solid rgba(20,22,26,0.08)' }}&gt;&#13;&#10;                    &lt;Text style={{ fontSize: 18, color: '#14161A' }}&gt;站错边（不是反方）&lt;/Text&gt;&#13;&#10;                    &lt;Text style={{ fontSize: 18, fontWeight: 'bold', color: '#14161A' }}&gt;25&lt;/Text&gt;&#13;&#10;                &lt;/Box&gt;&#13;&#10;&#13;&#10;                &lt;Box style={{ flexDirection: 'row', justifyContent: 'space-between', paddingTop: 12, paddingBottom: 12, borderBottom: '1px solid rgba(20,22,26,0.08)' }}&gt;&#13;&#10;                    &lt;Text style={{ fontSize: 18, color: '#14161A' }}&gt;无对立性表述&lt;/Text&gt;&#13;&#10;                    &lt;Text style={{ fontSize: 18, fontWeight: 'bold', color: '#14161A' }}&gt;8&lt;/Text&gt;&#13;&#10;                &lt;/Box&gt;&#13;&#10;&#13;&#10;                &lt;Box style={{ flexDirection: 'row', justifyContent: 'space-between', paddingTop: 12, paddingBottom: 12, borderBottom: '1px solid rgba(20,22,26,0.08)' }}&gt;&#13;&#10;                    &lt;Text style={{ fontSize: 18, color: '#14161A' }}&gt;判不出立场&lt;/Text&gt;&#13;&#10;                    &lt;Text style={{ fontSize: 18, fontWeight: 'bold', color: '#14161A' }}&gt;8&lt;/Text&gt;&#13;&#10;                &lt;/Box&gt;&#13;&#10;&#13;&#10;                &lt;Box style={{ flexDirection: 'row', justifyContent: 'space-between', paddingTop: 12, paddingBottom: 12, borderBottom: '1px solid rgba(20,22,26,0.08)' }}&gt;&#13;&#10;                    &lt;Text style={{ fontSize: 18, color: '#14161A' }}&gt;中立 / 两面都说&lt;/Text&gt;&#13;&#10;                    &lt;Text style={{ fontSize: 18, fontWeight: 'bold', color: '#14161A' }}&gt;6&lt;/Text&gt;&#13;&#10;                &lt;/Box&gt;&#13;&#10;&#13;&#10;                &lt;Text style={{ fontSize: 15, color: 'rgba(20,22,26,0.45)', marginTop: 12 }}&gt;另有少数因对立度不足、教程标题被拒&lt;/Text&gt;&#13;&#10;                &lt;Text style={{ fontSize: 14, color: 'rgba(20,22,26,0.40)', marginTop: 20, lineHeight: 1.6 }}&gt;&#13;&#10;                    还有 128 个候选在粗筛阶段就被判为与本议题无关，没有进模型。&#13;&#10;                &lt;/Text&gt;&#13;&#10;            &lt;/Box&gt;&#13;&#10;        &lt;/Box&gt;&#13;&#10;&#13;&#10;        &lt;Box style={{ position: 'absolute', left: 60, right: 60, bottom: 20, flexDirection: 'row', justifyContent: 'space-between' }}&gt;&#13;&#10;            &lt;Text style={{ fontSize: 13, color: 'rgba(20,22,26,0.40)' }}&gt;ANTIPODE · TECHATHON 2026&lt;/Text&gt;&#13;&#10;            &lt;Text style={{ fontSize: 13, color: 'rgba(20,22,26,0.40)' }}&gt;06 / 09&lt;/Text&gt;&#13;&#10;        &lt;/Box&gt;&#13;&#10;    &lt;/Box&gt;&#13;&#10;&lt;/Slide&gt;&#13;&#10;"/>
+        <p:cNvPr id="133" name=""/>
         <p:cNvGrpSpPr/>
         <p:nvPr/>
       </p:nvGrpSpPr>
@@ -6445,7 +6562,10 @@
         </p:spPr>
         <p:txBody>
           <a:bodyPr/>
-          <a:p/>
+          <a:p>
+            <a:pPr/>
+            <a:endParaRPr/>
+          </a:p>
         </p:txBody>
       </p:sp>
       <p:sp>
@@ -6693,7 +6813,10 @@
         </p:spPr>
         <p:txBody>
           <a:bodyPr/>
-          <a:p/>
+          <a:p>
+            <a:pPr/>
+            <a:endParaRPr/>
+          </a:p>
         </p:txBody>
       </p:sp>
       <p:sp>
@@ -6793,7 +6916,10 @@
         </p:spPr>
         <p:txBody>
           <a:bodyPr/>
-          <a:p/>
+          <a:p>
+            <a:pPr/>
+            <a:endParaRPr/>
+          </a:p>
         </p:txBody>
       </p:sp>
       <p:sp>
@@ -6891,7 +7017,10 @@
         </p:spPr>
         <p:txBody>
           <a:bodyPr/>
-          <a:p/>
+          <a:p>
+            <a:pPr/>
+            <a:endParaRPr/>
+          </a:p>
         </p:txBody>
       </p:sp>
       <p:sp>
@@ -6933,7 +7062,10 @@
         </p:spPr>
         <p:txBody>
           <a:bodyPr/>
-          <a:p/>
+          <a:p>
+            <a:pPr/>
+            <a:endParaRPr/>
+          </a:p>
         </p:txBody>
       </p:sp>
       <p:sp>
@@ -7095,7 +7227,10 @@
         </p:spPr>
         <p:txBody>
           <a:bodyPr/>
-          <a:p/>
+          <a:p>
+            <a:pPr/>
+            <a:endParaRPr/>
+          </a:p>
         </p:txBody>
       </p:sp>
       <p:sp>
@@ -7207,7 +7342,10 @@
         </p:spPr>
         <p:txBody>
           <a:bodyPr/>
-          <a:p/>
+          <a:p>
+            <a:pPr/>
+            <a:endParaRPr/>
+          </a:p>
         </p:txBody>
       </p:sp>
       <p:sp>
@@ -7319,7 +7457,10 @@
         </p:spPr>
         <p:txBody>
           <a:bodyPr/>
-          <a:p/>
+          <a:p>
+            <a:pPr/>
+            <a:endParaRPr/>
+          </a:p>
         </p:txBody>
       </p:sp>
       <p:sp>
@@ -7431,7 +7572,10 @@
         </p:spPr>
         <p:txBody>
           <a:bodyPr/>
-          <a:p/>
+          <a:p>
+            <a:pPr/>
+            <a:endParaRPr/>
+          </a:p>
         </p:txBody>
       </p:sp>
       <p:sp>
@@ -7708,7 +7852,7 @@
   <p:cSld>
     <p:spTree>
       <p:nvGrpSpPr>
-        <p:cNvPr id="165" name="" descr="&lt;Slide style={{ width: 1280, height: 720, background: '#F7F5F0', padding: '0px' }}&gt;&#10;    &lt;Box style={{ position: 'relative', width: 1280, height: 720, padding: '20px 60px' }}&gt;&#10;&#10;        &lt;Box style={{ height: 110, flexDirection: 'column', justifyContent: 'flex-end' }}&gt;&#10;            &lt;Text style={{ fontSize: 13, letterSpacing: 3, color: '#2F5BE4', marginBottom: 10 }}&gt;0 6 · 真 正 难 的 地 方&lt;/Text&gt;&#10;            &lt;Text style={{ fontSize: 38, fontWeight: 'bold', color: '#14161A', lineHeight: 1.25 }}&gt;&#10;                最大的敌人不是检索，是&lt;span style={{ color: '#C2410C' }}&gt;「看起来对」&lt;/span&gt;&#10;            &lt;/Text&gt;&#10;        &lt;/Box&gt;&#10;&#10;        &lt;Box style={{ height: 510, paddingTop: 10 }}&gt;&#10;&#10;            {/* 坑 1 */}&#10;            &lt;Box style={{ flexDirection: 'row', borderLeft: '3px solid #C2410C', paddingLeft: 22, paddingTop: 4, paddingBottom: 22, borderBottom: '1px solid rgba(20,22,26,0.10)' }}&gt;&#10;                &lt;Box style={{ flex: 1, flexDirection: 'column' }}&gt;&#10;                    &lt;Text style={{ fontSize: 24, fontWeight: 'bold', color: '#14161A' }}&gt;字面相反，不等于立场相反&lt;/Text&gt;&#10;                    &lt;Text style={{ fontSize: 17, color: 'rgba(20,22,26,0.60)', marginTop: 8, lineHeight: 1.6 }}&gt;&#10;                        检索把「过度依赖辅助驾驶」当成「反对 AI 编程助手」—— 词对上了，议题错了。&#10;                    &lt;/Text&gt;&#10;                &lt;/Box&gt;&#10;                &lt;Box style={{ width: 380, flexDirection: 'column', paddingLeft: 24 }}&gt;&#10;                    &lt;Text style={{ fontSize: 13, fontWeight: 'bold', color: 'rgba(20,22,26,0.40)', letterSpacing: 2 }}&gt;解法&lt;/Text&gt;&#10;                    &lt;Text style={{ fontSize: 17, color: '#14161A', marginTop: 6, lineHeight: 1.6 }}&gt;&#10;                        把议题做成二元结构，对立面是&lt;span style={{ fontWeight: 'bold' }}&gt;符号运算&lt;/span&gt;，不是语义判断。&#10;                    &lt;/Text&gt;&#10;                &lt;/Box&gt;&#10;            &lt;/Box&gt;&#10;&#10;            {/* 坑 2 */}&#10;            &lt;Box style={{ flexDirection: 'row', borderLeft: '3px solid #C2410C', paddingLeft: 22, paddingTop: 22, paddingBottom: 22, borderBottom: '1px solid rgba(20,22,26,0.10)' }}&gt;&#10;                &lt;Box style={{ flex: 1, flexDirection: 'column' }}&gt;&#10;                    &lt;Text style={{ fontSize: 24, fontWeight: 'bold', color: '#14161A' }}&gt;同形异义：同一个词，两场争论&lt;/Text&gt;&#10;                    &lt;Text style={{ fontSize: 17, color: 'rgba(20,22,26,0.60)', marginTop: 8, lineHeight: 1.6 }}&gt;&#10;                        「自建 CDN」被当成「自建 vs 上云」；《vue3 源码解析》被当成「支持 Vue 的观点」。&#10;                    &lt;/Text&gt;&#10;                &lt;/Box&gt;&#10;                &lt;Box style={{ width: 380, flexDirection: 'column', paddingLeft: 24 }}&gt;&#10;                    &lt;Text style={{ fontSize: 13, fontWeight: 'bold', color: 'rgba(20,22,26,0.40)', letterSpacing: 2 }}&gt;解法&lt;/Text&gt;&#10;                    &lt;Text style={{ fontSize: 17, color: '#14161A', marginTop: 6, lineHeight: 1.6 }}&gt;&#10;                        议题守卫 + 教程标题守卫，&lt;span style={{ fontWeight: 'bold' }}&gt;标题优先、纯规则、零模型成本&lt;/span&gt;。&#10;                    &lt;/Text&gt;&#10;                &lt;/Box&gt;&#10;            &lt;/Box&gt;&#10;&#10;            {/* 坑 3 */}&#10;            &lt;Box style={{ flexDirection: 'row', borderLeft: '3px solid #C2410C', paddingLeft: 22, paddingTop: 22, paddingBottom: 22, borderBottom: '1px solid rgba(20,22,26,0.10)' }}&gt;&#10;                &lt;Box style={{ flex: 1, flexDirection: 'column' }}&gt;&#10;                    &lt;Text style={{ fontSize: 24, fontWeight: 'bold', color: '#14161A' }}&gt;议题串味：顺带提一句，就被判成了立场&lt;/Text&gt;&#10;                    &lt;Text style={{ fontSize: 17, color: 'rgba(20,22,26,0.60)', marginTop: 8, lineHeight: 1.6 }}&gt;&#10;                        一篇讲远程办公的文章，因为文中提了 AI 工具，被判成「AI 助手有益」。&#10;                    &lt;/Text&gt;&#10;                &lt;/Box&gt;&#10;                &lt;Box style={{ width: 380, flexDirection: 'column', paddingLeft: 24 }}&gt;&#10;                    &lt;Text style={{ fontSize: 13, fontWeight: 'bold', color: 'rgba(20,22,26,0.40)', letterSpacing: 2 }}&gt;解法&lt;/Text&gt;&#10;                    &lt;Text style={{ fontSize: 17, color: '#14161A', marginTop: 6, lineHeight: 1.6 }}&gt;&#10;                        议题覆盖率闸门；不达标就把范围收紧到最高议题&lt;span style={{ fontWeight: 'bold' }}&gt;重判一次&lt;/span&gt;。&#10;                    &lt;/Text&gt;&#10;                &lt;/Box&gt;&#10;            &lt;/Box&gt;&#10;&#10;            &lt;Text style={{ fontSize: 16, color: 'rgba(20,22,26,0.55)', marginTop: 24, lineHeight: 1.6 }}&gt;&#10;                这三条都是&lt;span style={{ fontWeight: 'bold', color: '#14161A' }}&gt;整库连跑时才暴露的&lt;/span&gt; —— 单条 demo 永远测不出来，所以我们坚持跑整库、记账到每一条。&#10;            &lt;/Text&gt;&#10;        &lt;/Box&gt;&#10;&#10;        &lt;Box style={{ position: 'absolute', left: 60, right: 60, bottom: 20, flexDirection: 'row', justifyContent: 'space-between' }}&gt;&#10;            &lt;Text style={{ fontSize: 13, color: 'rgba(20,22,26,0.40)' }}&gt;ANTIPODE · TECHATHON 2026&lt;/Text&gt;&#10;            &lt;Text style={{ fontSize: 13, color: 'rgba(20,22,26,0.40)' }}&gt;07 / 09&lt;/Text&gt;&#10;        &lt;/Box&gt;&#10;    &lt;/Box&gt;&#10;&lt;/Slide&gt;&#10;"/>
+        <p:cNvPr id="165" name=""/>
         <p:cNvGrpSpPr/>
         <p:nvPr/>
       </p:nvGrpSpPr>
@@ -7741,7 +7885,10 @@
         </p:spPr>
         <p:txBody>
           <a:bodyPr/>
-          <a:p/>
+          <a:p>
+            <a:pPr/>
+            <a:endParaRPr/>
+          </a:p>
         </p:txBody>
       </p:sp>
       <p:sp>
@@ -7971,7 +8118,10 @@
         </p:spPr>
         <p:txBody>
           <a:bodyPr/>
-          <a:p/>
+          <a:p>
+            <a:pPr/>
+            <a:endParaRPr/>
+          </a:p>
         </p:txBody>
       </p:sp>
       <p:sp>
@@ -8013,7 +8163,10 @@
         </p:spPr>
         <p:txBody>
           <a:bodyPr/>
-          <a:p/>
+          <a:p>
+            <a:pPr/>
+            <a:endParaRPr/>
+          </a:p>
         </p:txBody>
       </p:sp>
       <p:sp>
@@ -8267,7 +8420,10 @@
         </p:spPr>
         <p:txBody>
           <a:bodyPr/>
-          <a:p/>
+          <a:p>
+            <a:pPr/>
+            <a:endParaRPr/>
+          </a:p>
         </p:txBody>
       </p:sp>
       <p:sp>
@@ -8309,7 +8465,10 @@
         </p:spPr>
         <p:txBody>
           <a:bodyPr/>
-          <a:p/>
+          <a:p>
+            <a:pPr/>
+            <a:endParaRPr/>
+          </a:p>
         </p:txBody>
       </p:sp>
       <p:sp>
@@ -8631,7 +8790,10 @@
         </p:spPr>
         <p:txBody>
           <a:bodyPr/>
-          <a:p/>
+          <a:p>
+            <a:pPr/>
+            <a:endParaRPr/>
+          </a:p>
         </p:txBody>
       </p:sp>
       <p:sp>
@@ -8673,7 +8835,10 @@
         </p:spPr>
         <p:txBody>
           <a:bodyPr/>
-          <a:p/>
+          <a:p>
+            <a:pPr/>
+            <a:endParaRPr/>
+          </a:p>
         </p:txBody>
       </p:sp>
       <p:sp>
@@ -9069,7 +9234,7 @@
   <p:cSld>
     <p:spTree>
       <p:nvGrpSpPr>
-        <p:cNvPr id="190" name="" descr="&lt;Slide style={{ width: 1280, height: 720, background: '#14161A', padding: '0px' }}&gt;&#13;&#10;    &lt;Box style={{ position: 'relative', width: 1280, height: 720, padding: '20px 60px' }}&gt;&#13;&#10;&#13;&#10;        &lt;Box style={{ height: 110, flexDirection: 'column', justifyContent: 'flex-end' }}&gt;&#13;&#10;            &lt;Text style={{ fontSize: 13, letterSpacing: 3, color: 'rgba(247,245,240,0.45)', marginBottom: 10 }}&gt;0 7 · 实 测&lt;/Text&gt;&#13;&#10;            &lt;Text style={{ fontSize: 34, fontWeight: 'bold', color: '#F7F5F0', lineHeight: 1.25 }}&gt;&#13;&#10;                不吹，就三个数&#13;&#10;            &lt;/Text&gt;&#13;&#10;        &lt;/Box&gt;&#13;&#10;&#13;&#10;        &lt;Box style={{ height: 430, flexDirection: 'row', alignItems: 'center' }}&gt;&#13;&#10;&#13;&#10;            &lt;Box style={{ flex: 1, flexDirection: 'column' }}&gt;&#13;&#10;                &lt;Text style={{ fontSize: 96, fontWeight: 'bold', color: '#F7F5F0', lineHeight: 1.0 }}&gt;90.2%&lt;/Text&gt;&#13;&#10;                &lt;Box style={{ width: 48, height: 2, background: '#2F5BE4', marginTop: 22, marginBottom: 18 }} /&gt;&#13;&#10;                &lt;Text style={{ fontSize: 19, color: 'rgba(247,245,240,0.85)' }}&gt;立场抽取四分类准确率&lt;/Text&gt;&#13;&#10;                &lt;Text style={{ fontSize: 15, color: 'rgba(247,245,240,0.40)', marginTop: 6 }}&gt;41 条人工标注评测集，非训练集&lt;/Text&gt;&#13;&#10;            &lt;/Box&gt;&#13;&#10;&#13;&#10;            &lt;Box style={{ width: 1, height: 220, background: 'rgba(247,245,240,0.14)' }} /&gt;&#13;&#10;&#13;&#10;            &lt;Box style={{ flex: 1, flexDirection: 'column', paddingLeft: 44 }}&gt;&#13;&#10;                &lt;Text style={{ fontSize: 96, fontWeight: 'bold', color: '#F7F5F0', lineHeight: 1.0 }}&gt;43%&lt;/Text&gt;&#13;&#10;                &lt;Box style={{ width: 48, height: 2, background: '#2F5BE4', marginTop: 22, marginBottom: 18 }} /&gt;&#13;&#10;                &lt;Text style={{ fontSize: 19, color: 'rgba(247,245,240,0.85)' }}&gt;条目命中率&lt;/Text&gt;&#13;&#10;                &lt;Text style={{ fontSize: 15, color: 'rgba(247,245,240,0.40)', marginTop: 6 }}&gt;7 条有效条目里 3 条找到了对立面&lt;/Text&gt;&#13;&#10;            &lt;/Box&gt;&#13;&#10;&#13;&#10;            &lt;Box style={{ width: 1, height: 220, background: 'rgba(247,245,240,0.14)' }} /&gt;&#13;&#10;&#13;&#10;            &lt;Box style={{ flex: 1, flexDirection: 'column', paddingLeft: 44 }}&gt;&#13;&#10;                &lt;Text style={{ fontSize: 96, fontWeight: 'bold', color: '#C2410C', lineHeight: 1.0 }}&gt;0&lt;/Text&gt;&#13;&#10;                &lt;Box style={{ width: 48, height: 2, background: '#C2410C', marginTop: 22, marginBottom: 18 }} /&gt;&#13;&#10;                &lt;Text style={{ fontSize: 19, color: 'rgba(247,245,240,0.85)' }}&gt;条 AI 编造&lt;/Text&gt;&#13;&#10;                &lt;Text style={{ fontSize: 15, color: 'rgba(247,245,240,0.40)', marginTop: 6 }}&gt;6 条反库条目，全部带真实 URL&lt;/Text&gt;&#13;&#10;            &lt;/Box&gt;&#13;&#10;        &lt;/Box&gt;&#13;&#10;&#13;&#10;        &lt;Box style={{ borderTop: '1px solid rgba(247,245,240,0.14)', paddingTop: 18, flexDirection: 'row', alignItems: 'center', gap: 18 }}&gt;&#13;&#10;            &lt;Text style={{ fontSize: 14, fontWeight: 'bold', color: '#C2410C', width: 84 }}&gt;诚实的边界&lt;/Text&gt;&#13;&#10;            &lt;Text style={{ fontSize: 17, color: 'rgba(247,245,240,0.62)', flex: 1, lineHeight: 1.6 }}&gt;&#13;&#10;                中文观点内容的检索平均可用率约 1/4。我们把这条写进材料，而不是用「候选数」冒充产出量；所有数字都可用 run_vault.py 复跑。&#13;&#10;            &lt;/Text&gt;&#13;&#10;        &lt;/Box&gt;&#13;&#10;&#13;&#10;        &lt;Box style={{ position: 'absolute', left: 60, right: 60, bottom: 20, flexDirection: 'row', justifyContent: 'space-between' }}&gt;&#13;&#10;            &lt;Text style={{ fontSize: 13, color: 'rgba(247,245,240,0.30)' }}&gt;ANTIPODE · TECHATHON 2026&lt;/Text&gt;&#13;&#10;            &lt;Text style={{ fontSize: 13, color: 'rgba(247,245,240,0.30)' }}&gt;08 / 09&lt;/Text&gt;&#13;&#10;        &lt;/Box&gt;&#13;&#10;    &lt;/Box&gt;&#13;&#10;&lt;/Slide&gt;&#13;&#10;"/>
+        <p:cNvPr id="190" name=""/>
         <p:cNvGrpSpPr/>
         <p:nvPr/>
       </p:nvGrpSpPr>
@@ -9102,7 +9267,10 @@
         </p:spPr>
         <p:txBody>
           <a:bodyPr/>
-          <a:p/>
+          <a:p>
+            <a:pPr/>
+            <a:endParaRPr/>
+          </a:p>
         </p:txBody>
       </p:sp>
       <p:sp>
@@ -9269,7 +9437,10 @@
         </p:spPr>
         <p:txBody>
           <a:bodyPr/>
-          <a:p/>
+          <a:p>
+            <a:pPr/>
+            <a:endParaRPr/>
+          </a:p>
         </p:txBody>
       </p:sp>
       <p:sp>
@@ -9381,7 +9552,10 @@
         </p:spPr>
         <p:txBody>
           <a:bodyPr/>
-          <a:p/>
+          <a:p>
+            <a:pPr/>
+            <a:endParaRPr/>
+          </a:p>
         </p:txBody>
       </p:sp>
       <p:sp>
@@ -9440,7 +9614,10 @@
         </p:spPr>
         <p:txBody>
           <a:bodyPr/>
-          <a:p/>
+          <a:p>
+            <a:pPr/>
+            <a:endParaRPr/>
+          </a:p>
         </p:txBody>
       </p:sp>
       <p:sp>
@@ -9576,7 +9753,10 @@
         </p:spPr>
         <p:txBody>
           <a:bodyPr/>
-          <a:p/>
+          <a:p>
+            <a:pPr/>
+            <a:endParaRPr/>
+          </a:p>
         </p:txBody>
       </p:sp>
       <p:sp>
@@ -9635,7 +9815,10 @@
         </p:spPr>
         <p:txBody>
           <a:bodyPr/>
-          <a:p/>
+          <a:p>
+            <a:pPr/>
+            <a:endParaRPr/>
+          </a:p>
         </p:txBody>
       </p:sp>
       <p:sp>
@@ -9799,7 +9982,10 @@
         </p:spPr>
         <p:txBody>
           <a:bodyPr/>
-          <a:p/>
+          <a:p>
+            <a:pPr/>
+            <a:endParaRPr/>
+          </a:p>
         </p:txBody>
       </p:sp>
       <p:sp>
@@ -10006,7 +10192,7 @@
   <p:cSld>
     <p:spTree>
       <p:nvGrpSpPr>
-        <p:cNvPr id="213" name="" descr="&lt;Slide style={{ width: 1280, height: 720, background: 'linear-gradient(120deg, #14161A 0%, #1D2430 100%)', padding: '0px' }}&gt;&#10;    &lt;Box style={{ position: 'relative', width: 1280, height: 720, padding: '0px 80px', justifyContent: 'center' }}&gt;&#10;&#10;        &lt;Text style={{ fontSize: 13, letterSpacing: 3, color: 'rgba(247,245,240,0.40)', marginBottom: 30 }}&gt;TECHATHON 2026 · ANTIPODE&lt;/Text&gt;&#10;&#10;        &lt;Text style={{ fontSize: 64, fontWeight: 'bold', color: '#F7F5F0', lineHeight: 1.35 }}&gt;&#10;            仓库之外，&lt;br /&gt;还应该有一层。&#10;        &lt;/Text&gt;&#10;&#10;        &lt;Box style={{ width: 64, height: 2, background: '#C2410C', marginTop: 34, marginBottom: 26 }} /&gt;&#10;&#10;        &lt;Text style={{ fontSize: 22, color: 'rgba(247,245,240,0.62)', lineHeight: 1.7 }}&gt;&#10;            不是让你看得更多，是让你看见自己&lt;span style={{ color: '#F7F5F0', fontWeight: 'bold' }}&gt;没在看的那一面&lt;/span&gt;。&#10;        &lt;/Text&gt;&#10;&#10;        &lt;Box style={{ flexDirection: 'row', gap: 34, marginTop: 56 }}&gt;&#10;            &lt;Text style={{ fontSize: 15, color: 'rgba(247,245,240,0.45)' }}&gt;可选开关&lt;/Text&gt;&#10;            &lt;Text style={{ fontSize: 15, color: 'rgba(247,245,240,0.45)' }}&gt;·&lt;/Text&gt;&#10;            &lt;Text style={{ fontSize: 15, color: 'rgba(247,245,240,0.45)' }}&gt;真实出处&lt;/Text&gt;&#10;            &lt;Text style={{ fontSize: 15, color: 'rgba(247,245,240,0.45)' }}&gt;·&lt;/Text&gt;&#10;            &lt;Text style={{ fontSize: 15, color: 'rgba(247,245,240,0.45)' }}&gt;没有就不给&lt;/Text&gt;&#10;        &lt;/Box&gt;&#10;&#10;        &lt;Box style={{ position: 'absolute', left: 80, right: 80, bottom: 46, flexDirection: 'row', justifyContent: 'space-between', alignItems: 'flex-end' }}&gt;&#10;            &lt;Box style={{ flexDirection: 'column' }}&gt;&#10;                &lt;Text style={{ fontSize: 14, color: 'rgba(247,245,240,0.32)' }}&gt;github.com/Techathon2026/antipode&lt;/Text&gt;&#10;                &lt;Text style={{ fontSize: 14, color: 'rgba(247,245,240,0.32)', marginTop: 4 }}&gt;docs/反库演示.html　·　断网可演示&lt;/Text&gt;&#10;            &lt;/Box&gt;&#10;            &lt;Text style={{ fontSize: 14, color: 'rgba(247,245,240,0.32)' }}&gt;谢谢&lt;/Text&gt;&#10;        &lt;/Box&gt;&#10;    &lt;/Box&gt;&#10;&lt;/Slide&gt;&#10;"/>
+        <p:cNvPr id="213" name=""/>
         <p:cNvGrpSpPr/>
         <p:nvPr/>
       </p:nvGrpSpPr>
@@ -10047,7 +10233,10 @@
         </p:spPr>
         <p:txBody>
           <a:bodyPr/>
-          <a:p/>
+          <a:p>
+            <a:pPr/>
+            <a:endParaRPr/>
+          </a:p>
         </p:txBody>
       </p:sp>
       <p:sp>
@@ -10161,7 +10350,10 @@
         </p:spPr>
         <p:txBody>
           <a:bodyPr/>
-          <a:p/>
+          <a:p>
+            <a:pPr/>
+            <a:endParaRPr/>
+          </a:p>
         </p:txBody>
       </p:sp>
       <p:sp>
